--- a/assets/pptx/catalog-483.pptx
+++ b/assets/pptx/catalog-483.pptx
@@ -3254,7 +3254,7 @@
                 <a:ea typeface="Ebrima"/>
                 <a:cs typeface="Ebrima"/>
               </a:rPr>
-              <a:t>ኦ ኢየሱስ ኢየሱስ ኢየሱስ (4x)</a:t>
+              <a:t>ኦ ኢየሱስ ኢየሱስ ኢየሱስ 4x</a:t>
             </a:r>
           </a:p>
         </p:txBody>
@@ -3339,7 +3339,7 @@
                 <a:ea typeface="Ebrima"/>
                 <a:cs typeface="Ebrima"/>
               </a:rPr>
-              <a:t>ክብርህን ለመጣል ክብር መጣልህ (2x)</a:t>
+              <a:t>ክብርህን ለመጣል ክብር መጣልህ 2x</a:t>
             </a:r>
           </a:p>
           <a:p>
@@ -3375,7 +3375,7 @@
                 <a:ea typeface="Ebrima"/>
                 <a:cs typeface="Ebrima"/>
               </a:rPr>
-              <a:t>ከሥሞች የሚበልጥ ሥምን አሰጥቶሃል (2x)</a:t>
+              <a:t>ከሥሞች የሚበልጥ ሥምን አሰጥቶሃል 2x</a:t>
             </a:r>
           </a:p>
         </p:txBody>
@@ -3442,7 +3442,7 @@
                 <a:ea typeface="Ebrima"/>
                 <a:cs typeface="Ebrima"/>
               </a:rPr>
-              <a:t>ኦ ኢየሱስ ኢየሱስ ኢየሱስ (4x)</a:t>
+              <a:t>ኦ ኢየሱስ ኢየሱስ ኢየሱስ 4x</a:t>
             </a:r>
           </a:p>
         </p:txBody>
@@ -3666,7 +3666,7 @@
                 <a:ea typeface="Ebrima"/>
                 <a:cs typeface="Ebrima"/>
               </a:rPr>
-              <a:t>ኦ ኢየሱስ ኢየሱስ ኢየሱስ (4x)</a:t>
+              <a:t>ኦ ኢየሱስ ኢየሱስ ኢየሱስ 4x</a:t>
             </a:r>
           </a:p>
         </p:txBody>
@@ -3751,7 +3751,7 @@
                 <a:ea typeface="Ebrima"/>
                 <a:cs typeface="Ebrima"/>
               </a:rPr>
-              <a:t>አምላኬ ፊት እንደ ጅረት ቢፈስልኝ (2x)</a:t>
+              <a:t>አምላኬ ፊት እንደ ጅረት ቢፈስልኝ 2x</a:t>
             </a:r>
           </a:p>
         </p:txBody>
@@ -3908,7 +3908,7 @@
                 <a:ea typeface="Ebrima"/>
                 <a:cs typeface="Ebrima"/>
               </a:rPr>
-              <a:t>ከቶ አልሄድም ክበር ሳልልህ (2x)</a:t>
+              <a:t>ከቶ አልሄድም ክበር ሳልልህ 2x</a:t>
             </a:r>
           </a:p>
         </p:txBody>
@@ -3975,7 +3975,7 @@
                 <a:ea typeface="Ebrima"/>
                 <a:cs typeface="Ebrima"/>
               </a:rPr>
-              <a:t>ኦ ኢየሱስ ኢየሱስ ኢየሱስ (4x)</a:t>
+              <a:t>ኦ ኢየሱስ ኢየሱስ ኢየሱስ 4x</a:t>
             </a:r>
           </a:p>
         </p:txBody>
@@ -4060,7 +4060,7 @@
                 <a:ea typeface="Ebrima"/>
                 <a:cs typeface="Ebrima"/>
               </a:rPr>
-              <a:t>ኢየሱስ ኢየሱስ እልሃለሁ እልሃለሁ (2x)</a:t>
+              <a:t>ኢየሱስ ኢየሱስ እልሃለሁ እልሃለሁ 2x</a:t>
             </a:r>
           </a:p>
         </p:txBody>
@@ -4194,7 +4194,7 @@
                 <a:ea typeface="Ebrima"/>
                 <a:cs typeface="Ebrima"/>
               </a:rPr>
-              <a:t>ኦ ኢየሱስ ኢየሱስ ኢየሱስ (4x)</a:t>
+              <a:t>ኦ ኢየሱስ ኢየሱስ ኢየሱስ 4x</a:t>
             </a:r>
           </a:p>
         </p:txBody>
@@ -4279,7 +4279,7 @@
                 <a:ea typeface="Ebrima"/>
                 <a:cs typeface="Ebrima"/>
               </a:rPr>
-              <a:t>ከሥምህ የሚበልጥ ሥም ይገኛል ወይ (2x)</a:t>
+              <a:t>ከሥምህ የሚበልጥ ሥም ይገኛል ወይ 2x</a:t>
             </a:r>
           </a:p>
           <a:p>
@@ -4315,7 +4315,7 @@
                 <a:ea typeface="Ebrima"/>
                 <a:cs typeface="Ebrima"/>
               </a:rPr>
-              <a:t>ከሥማቸው ይልቅ ሥምህን ወደዱ (2x)</a:t>
+              <a:t>ከሥማቸው ይልቅ ሥምህን ወደዱ 2x</a:t>
             </a:r>
           </a:p>
         </p:txBody>
@@ -4382,7 +4382,7 @@
                 <a:ea typeface="Ebrima"/>
                 <a:cs typeface="Ebrima"/>
               </a:rPr>
-              <a:t>ኦ ኢየሱስ ኢየሱስ ኢየሱስ (4x)</a:t>
+              <a:t>ኦ ኢየሱስ ኢየሱስ ኢየሱስ 4x</a:t>
             </a:r>
           </a:p>
         </p:txBody>
@@ -4467,7 +4467,7 @@
                 <a:ea typeface="Ebrima"/>
                 <a:cs typeface="Ebrima"/>
               </a:rPr>
-              <a:t>ሥሙን ያስወደደው በሃሪው እኮ ነው (2x)</a:t>
+              <a:t>ሥሙን ያስወደደው በሃሪው እኮ ነው 2x</a:t>
             </a:r>
           </a:p>
           <a:p>
@@ -4503,7 +4503,7 @@
                 <a:ea typeface="Ebrima"/>
                 <a:cs typeface="Ebrima"/>
               </a:rPr>
-              <a:t>እንደ ኢየሱስ ያለ ከወዴት ይገኛል (2x)</a:t>
+              <a:t>እንደ ኢየሱስ ያለ ከወዴት ይገኛል 2x</a:t>
             </a:r>
           </a:p>
         </p:txBody>
